--- a/data-eng/decks/w2d1s3.pptx
+++ b/data-eng/decks/w2d1s3.pptx
@@ -4379,7 +4379,7 @@
                 <a:ea typeface="Pretendard"/>
                 <a:cs typeface="Pretendard"/>
               </a:rPr>
-              <a:t>전자 3건 · AND 2건 · BETWEEN 2건 · LIKE 1건</a:t>
+              <a:t>전자 3 · AND 2 · BETWEEN 2 · LIKE 1 · OFFSET 텀블러부터</a:t>
             </a:r>
           </a:p>
         </p:txBody>
@@ -4525,7 +4525,7 @@
                 <a:ea typeface="Pretendard"/>
                 <a:cs typeface="Pretendard"/>
               </a:rPr>
-              <a:t>GROUP BY 에 잡화·전자 2행, HAVING COUNT(*) &gt;= 3 은 전자만</a:t>
+              <a:t>AVG 17000.0000·49666.6667, HAVING 은 전자만</a:t>
             </a:r>
           </a:p>
         </p:txBody>
@@ -6469,7 +6469,7 @@
                 <a:ea typeface="Pretendard"/>
                 <a:cs typeface="Pretendard"/>
               </a:rPr>
-              <a:t>모든 SQL 은 mysql&gt; 프롬프트 안에서 — 앞 챕터의 docker exec 명령으로 다시 접속해 두세요</a:t>
+              <a:t>모든 SQL 은 mysql&gt; 안에서 — -e LANG=C.UTF-8 을 넣은 docker exec 로 접속해 두세요</a:t>
             </a:r>
           </a:p>
         </p:txBody>
@@ -11821,7 +11821,7 @@
                 <a:ea typeface="Pretendard"/>
                 <a:cs typeface="Pretendard"/>
               </a:rPr>
-              <a:t>price 가 INT 라 거부</a:t>
+              <a:t>price 가 INT 라 거부 — 8.0 기본 strict 모드</a:t>
             </a:r>
           </a:p>
         </p:txBody>
@@ -12883,25 +12883,7 @@
                 <a:ea typeface="Pretendard"/>
                 <a:cs typeface="Pretendard"/>
               </a:rPr>
-              <a:t>WHERE stock &gt; 0</a:t>
-            </a:r>
-          </a:p>
-          <a:p>
-            <a:pPr algn="ctr">
-              <a:lnSpc>
-                <a:spcPct val="115000"/>
-              </a:lnSpc>
-            </a:pPr>
-            <a:r>
-              <a:rPr sz="1875" b="0">
-                <a:solidFill>
-                  <a:srgbClr val="3D3D3D"/>
-                </a:solidFill>
-                <a:latin typeface="Pretendard"/>
-                <a:ea typeface="Pretendard"/>
-                <a:cs typeface="Pretendard"/>
-              </a:rPr>
-              <a:t>AND price &lt;= 20000</a:t>
+              <a:t>stock &gt; 0 AND price &lt;= 20000</a:t>
             </a:r>
           </a:p>
         </p:txBody>
@@ -13126,25 +13108,7 @@
                 <a:ea typeface="Pretendard"/>
                 <a:cs typeface="Pretendard"/>
               </a:rPr>
-              <a:t>WHERE price BETWEEN</a:t>
-            </a:r>
-          </a:p>
-          <a:p>
-            <a:pPr algn="ctr">
-              <a:lnSpc>
-                <a:spcPct val="115000"/>
-              </a:lnSpc>
-            </a:pPr>
-            <a:r>
-              <a:rPr sz="1875" b="0">
-                <a:solidFill>
-                  <a:srgbClr val="3D3D3D"/>
-                </a:solidFill>
-                <a:latin typeface="Pretendard"/>
-                <a:ea typeface="Pretendard"/>
-                <a:cs typeface="Pretendard"/>
-              </a:rPr>
-              <a:t>20000 AND 50000</a:t>
+              <a:t>price BETWEEN 20000 AND 50000</a:t>
             </a:r>
           </a:p>
         </p:txBody>
@@ -13819,25 +13783,7 @@
                 <a:ea typeface="Pretendard"/>
                 <a:cs typeface="Pretendard"/>
               </a:rPr>
-              <a:t>ORDER BY category ASC,</a:t>
-            </a:r>
-          </a:p>
-          <a:p>
-            <a:pPr algn="ctr">
-              <a:lnSpc>
-                <a:spcPct val="115000"/>
-              </a:lnSpc>
-            </a:pPr>
-            <a:r>
-              <a:rPr sz="1875" b="0">
-                <a:solidFill>
-                  <a:srgbClr val="3D3D3D"/>
-                </a:solidFill>
-                <a:latin typeface="Pretendard"/>
-                <a:ea typeface="Pretendard"/>
-                <a:cs typeface="Pretendard"/>
-              </a:rPr>
-              <a:t>price ASC</a:t>
+              <a:t>ORDER BY category, price</a:t>
             </a:r>
           </a:p>
         </p:txBody>
@@ -14062,25 +14008,7 @@
                 <a:ea typeface="Pretendard"/>
                 <a:cs typeface="Pretendard"/>
               </a:rPr>
-              <a:t>ORDER BY price DESC</a:t>
-            </a:r>
-          </a:p>
-          <a:p>
-            <a:pPr algn="ctr">
-              <a:lnSpc>
-                <a:spcPct val="115000"/>
-              </a:lnSpc>
-            </a:pPr>
-            <a:r>
-              <a:rPr sz="1875" b="0">
-                <a:solidFill>
-                  <a:srgbClr val="3D3D3D"/>
-                </a:solidFill>
-                <a:latin typeface="Pretendard"/>
-                <a:ea typeface="Pretendard"/>
-                <a:cs typeface="Pretendard"/>
-              </a:rPr>
-              <a:t>LIMIT 2 OFFSET 3</a:t>
+              <a:t>DESC LIMIT 2 OFFSET 3</a:t>
             </a:r>
           </a:p>
         </p:txBody>
@@ -14155,7 +14083,7 @@
                 <a:ea typeface="Pretendard"/>
                 <a:cs typeface="Pretendard"/>
               </a:rPr>
-              <a:t>무선 마우스·노트북 파우치</a:t>
+              <a:t>텀블러·노트북 파우치</a:t>
             </a:r>
           </a:p>
         </p:txBody>
@@ -15584,7 +15512,7 @@
                 <a:ea typeface="Pretendard"/>
                 <a:cs typeface="Pretendard"/>
               </a:rPr>
-              <a:t>SELECT category, COUNT(*), AVG(price), SUM(stock), MAX(price) FROM products GROUP BY category; → 잡화 2 · 전자 3</a:t>
+              <a:t>GROUP BY category → 잡화 2개 · 평균 17000.0000 / 전자 3개 · 평균 49666.6667 (AVG 는 소수 넷째 자리까지)</a:t>
             </a:r>
           </a:p>
         </p:txBody>
@@ -16245,7 +16173,7 @@
                 <a:ea typeface="Pretendard"/>
                 <a:cs typeface="Pretendard"/>
               </a:rPr>
-              <a:t>HAVING AVG(price) &gt; 20000 과 함께</a:t>
+              <a:t>+ HAVING AVG(price) &gt; 20000 → 전자 58500.0000</a:t>
             </a:r>
           </a:p>
         </p:txBody>

--- a/data-eng/decks/w2d1s3.pptx
+++ b/data-eng/decks/w2d1s3.pptx
@@ -3100,7 +3100,7 @@
       <p:grpSpPr/>
       <p:sp>
         <p:nvSpPr>
-          <p:cNvPr id="2" name="Oval 1"/>
+          <p:cNvPr id="2" name="deckgen:decor"/>
           <p:cNvSpPr/>
           <p:nvPr/>
         </p:nvSpPr>
@@ -3130,7 +3130,7 @@
       </p:sp>
       <p:sp>
         <p:nvSpPr>
-          <p:cNvPr id="3" name="Oval 2"/>
+          <p:cNvPr id="3" name="deckgen:decor"/>
           <p:cNvSpPr/>
           <p:nvPr/>
         </p:nvSpPr>
@@ -3160,7 +3160,7 @@
       </p:sp>
       <p:sp>
         <p:nvSpPr>
-          <p:cNvPr id="4" name="Oval 3"/>
+          <p:cNvPr id="4" name="deckgen:decor"/>
           <p:cNvSpPr/>
           <p:nvPr/>
         </p:nvSpPr>
@@ -3190,7 +3190,7 @@
       </p:sp>
       <p:sp>
         <p:nvSpPr>
-          <p:cNvPr id="5" name="Rectangle 4"/>
+          <p:cNvPr id="5" name="deckgen:decor"/>
           <p:cNvSpPr/>
           <p:nvPr/>
         </p:nvSpPr>
@@ -3220,7 +3220,7 @@
       </p:sp>
       <p:sp>
         <p:nvSpPr>
-          <p:cNvPr id="6" name="Oval 5"/>
+          <p:cNvPr id="6" name="deckgen:decor"/>
           <p:cNvSpPr/>
           <p:nvPr/>
         </p:nvSpPr>
@@ -3250,7 +3250,7 @@
       </p:sp>
       <p:sp>
         <p:nvSpPr>
-          <p:cNvPr id="7" name="Oval 6"/>
+          <p:cNvPr id="7" name="deckgen:decor"/>
           <p:cNvSpPr/>
           <p:nvPr/>
         </p:nvSpPr>
@@ -3280,7 +3280,7 @@
       </p:sp>
       <p:sp>
         <p:nvSpPr>
-          <p:cNvPr id="8" name="Oval 7"/>
+          <p:cNvPr id="8" name="deckgen:decor"/>
           <p:cNvSpPr/>
           <p:nvPr/>
         </p:nvSpPr>
@@ -3310,7 +3310,7 @@
       </p:sp>
       <p:sp>
         <p:nvSpPr>
-          <p:cNvPr id="9" name="Oval 8"/>
+          <p:cNvPr id="9" name="deckgen:decor"/>
           <p:cNvSpPr/>
           <p:nvPr/>
         </p:nvSpPr>
@@ -3340,7 +3340,7 @@
       </p:sp>
       <p:sp>
         <p:nvSpPr>
-          <p:cNvPr id="10" name="Rectangle 9"/>
+          <p:cNvPr id="10" name="deckgen:decor"/>
           <p:cNvSpPr/>
           <p:nvPr/>
         </p:nvSpPr>
@@ -3434,7 +3434,7 @@
                 <a:ea typeface="Pretendard"/>
                 <a:cs typeface="Pretendard"/>
               </a:rPr>
-              <a:t>2-1 · MySQL 8.0 설치 및 기초 쿼리 · 실습 1.5H</a:t>
+              <a:t>2-1 · MySQL 9.7 설치 및 기초 쿼리 · 실습 1.5H</a:t>
             </a:r>
           </a:p>
         </p:txBody>
@@ -3600,7 +3600,7 @@
       <p:grpSpPr/>
       <p:sp>
         <p:nvSpPr>
-          <p:cNvPr id="2" name="Oval 1"/>
+          <p:cNvPr id="2" name="deckgen:decor"/>
           <p:cNvSpPr/>
           <p:nvPr/>
         </p:nvSpPr>
@@ -3630,7 +3630,7 @@
       </p:sp>
       <p:sp>
         <p:nvSpPr>
-          <p:cNvPr id="3" name="Oval 2"/>
+          <p:cNvPr id="3" name="deckgen:decor"/>
           <p:cNvSpPr/>
           <p:nvPr/>
         </p:nvSpPr>
@@ -3660,7 +3660,7 @@
       </p:sp>
       <p:sp>
         <p:nvSpPr>
-          <p:cNvPr id="4" name="Oval 3"/>
+          <p:cNvPr id="4" name="deckgen:decor"/>
           <p:cNvSpPr/>
           <p:nvPr/>
         </p:nvSpPr>
@@ -4808,7 +4808,7 @@
       <p:grpSpPr/>
       <p:sp>
         <p:nvSpPr>
-          <p:cNvPr id="2" name="Oval 1"/>
+          <p:cNvPr id="2" name="deckgen:decor"/>
           <p:cNvSpPr/>
           <p:nvPr/>
         </p:nvSpPr>
@@ -4838,7 +4838,7 @@
       </p:sp>
       <p:sp>
         <p:nvSpPr>
-          <p:cNvPr id="3" name="Oval 2"/>
+          <p:cNvPr id="3" name="deckgen:decor"/>
           <p:cNvSpPr/>
           <p:nvPr/>
         </p:nvSpPr>
@@ -5615,7 +5615,7 @@
       <p:grpSpPr/>
       <p:sp>
         <p:nvSpPr>
-          <p:cNvPr id="2" name="Oval 1"/>
+          <p:cNvPr id="2" name="deckgen:decor"/>
           <p:cNvSpPr/>
           <p:nvPr/>
         </p:nvSpPr>
@@ -5645,7 +5645,7 @@
       </p:sp>
       <p:sp>
         <p:nvSpPr>
-          <p:cNvPr id="3" name="Oval 2"/>
+          <p:cNvPr id="3" name="deckgen:decor"/>
           <p:cNvSpPr/>
           <p:nvPr/>
         </p:nvSpPr>
@@ -5675,7 +5675,7 @@
       </p:sp>
       <p:sp>
         <p:nvSpPr>
-          <p:cNvPr id="4" name="Oval 3"/>
+          <p:cNvPr id="4" name="deckgen:decor"/>
           <p:cNvSpPr/>
           <p:nvPr/>
         </p:nvSpPr>
@@ -6606,7 +6606,7 @@
       <p:grpSpPr/>
       <p:sp>
         <p:nvSpPr>
-          <p:cNvPr id="2" name="Oval 1"/>
+          <p:cNvPr id="2" name="deckgen:decor"/>
           <p:cNvSpPr/>
           <p:nvPr/>
         </p:nvSpPr>
@@ -6636,7 +6636,7 @@
       </p:sp>
       <p:sp>
         <p:nvSpPr>
-          <p:cNvPr id="3" name="Oval 2"/>
+          <p:cNvPr id="3" name="deckgen:decor"/>
           <p:cNvSpPr/>
           <p:nvPr/>
         </p:nvSpPr>
@@ -6666,7 +6666,7 @@
       </p:sp>
       <p:sp>
         <p:nvSpPr>
-          <p:cNvPr id="4" name="Oval 3"/>
+          <p:cNvPr id="4" name="deckgen:decor"/>
           <p:cNvSpPr/>
           <p:nvPr/>
         </p:nvSpPr>
@@ -7799,7 +7799,7 @@
       <p:grpSpPr/>
       <p:sp>
         <p:nvSpPr>
-          <p:cNvPr id="2" name="Oval 1"/>
+          <p:cNvPr id="2" name="deckgen:decor"/>
           <p:cNvSpPr/>
           <p:nvPr/>
         </p:nvSpPr>
@@ -7829,7 +7829,7 @@
       </p:sp>
       <p:sp>
         <p:nvSpPr>
-          <p:cNvPr id="3" name="Oval 2"/>
+          <p:cNvPr id="3" name="deckgen:decor"/>
           <p:cNvSpPr/>
           <p:nvPr/>
         </p:nvSpPr>
@@ -7859,7 +7859,7 @@
       </p:sp>
       <p:sp>
         <p:nvSpPr>
-          <p:cNvPr id="4" name="Oval 3"/>
+          <p:cNvPr id="4" name="deckgen:decor"/>
           <p:cNvSpPr/>
           <p:nvPr/>
         </p:nvSpPr>
@@ -11110,7 +11110,7 @@
       <p:grpSpPr/>
       <p:sp>
         <p:nvSpPr>
-          <p:cNvPr id="2" name="Oval 1"/>
+          <p:cNvPr id="2" name="deckgen:decor"/>
           <p:cNvSpPr/>
           <p:nvPr/>
         </p:nvSpPr>
@@ -11140,7 +11140,7 @@
       </p:sp>
       <p:sp>
         <p:nvSpPr>
-          <p:cNvPr id="3" name="Oval 2"/>
+          <p:cNvPr id="3" name="deckgen:decor"/>
           <p:cNvSpPr/>
           <p:nvPr/>
         </p:nvSpPr>
@@ -11170,7 +11170,7 @@
       </p:sp>
       <p:sp>
         <p:nvSpPr>
-          <p:cNvPr id="4" name="Oval 3"/>
+          <p:cNvPr id="4" name="deckgen:decor"/>
           <p:cNvSpPr/>
           <p:nvPr/>
         </p:nvSpPr>
@@ -11821,7 +11821,7 @@
                 <a:ea typeface="Pretendard"/>
                 <a:cs typeface="Pretendard"/>
               </a:rPr>
-              <a:t>price 가 INT 라 거부 — 8.0 기본 strict 모드</a:t>
+              <a:t>price 가 INT 라 거부 — 기본 strict 모드(8.0 · 9.7 같음)</a:t>
             </a:r>
           </a:p>
         </p:txBody>
@@ -12100,7 +12100,7 @@
       <p:grpSpPr/>
       <p:sp>
         <p:nvSpPr>
-          <p:cNvPr id="2" name="Oval 1"/>
+          <p:cNvPr id="2" name="deckgen:decor"/>
           <p:cNvSpPr/>
           <p:nvPr/>
         </p:nvSpPr>
@@ -12130,7 +12130,7 @@
       </p:sp>
       <p:sp>
         <p:nvSpPr>
-          <p:cNvPr id="3" name="Oval 2"/>
+          <p:cNvPr id="3" name="deckgen:decor"/>
           <p:cNvSpPr/>
           <p:nvPr/>
         </p:nvSpPr>
@@ -12160,7 +12160,7 @@
       </p:sp>
       <p:sp>
         <p:nvSpPr>
-          <p:cNvPr id="4" name="Oval 3"/>
+          <p:cNvPr id="4" name="deckgen:decor"/>
           <p:cNvSpPr/>
           <p:nvPr/>
         </p:nvSpPr>
@@ -14261,7 +14261,7 @@
       <p:grpSpPr/>
       <p:sp>
         <p:nvSpPr>
-          <p:cNvPr id="2" name="Oval 1"/>
+          <p:cNvPr id="2" name="deckgen:decor"/>
           <p:cNvSpPr/>
           <p:nvPr/>
         </p:nvSpPr>
@@ -14291,7 +14291,7 @@
       </p:sp>
       <p:sp>
         <p:nvSpPr>
-          <p:cNvPr id="3" name="Oval 2"/>
+          <p:cNvPr id="3" name="deckgen:decor"/>
           <p:cNvSpPr/>
           <p:nvPr/>
         </p:nvSpPr>
@@ -14321,7 +14321,7 @@
       </p:sp>
       <p:sp>
         <p:nvSpPr>
-          <p:cNvPr id="4" name="Oval 3"/>
+          <p:cNvPr id="4" name="deckgen:decor"/>
           <p:cNvSpPr/>
           <p:nvPr/>
         </p:nvSpPr>
@@ -15649,7 +15649,7 @@
       <p:grpSpPr/>
       <p:sp>
         <p:nvSpPr>
-          <p:cNvPr id="2" name="Oval 1"/>
+          <p:cNvPr id="2" name="deckgen:decor"/>
           <p:cNvSpPr/>
           <p:nvPr/>
         </p:nvSpPr>
@@ -15679,7 +15679,7 @@
       </p:sp>
       <p:sp>
         <p:nvSpPr>
-          <p:cNvPr id="3" name="Oval 2"/>
+          <p:cNvPr id="3" name="deckgen:decor"/>
           <p:cNvSpPr/>
           <p:nvPr/>
         </p:nvSpPr>
@@ -15709,7 +15709,7 @@
       </p:sp>
       <p:sp>
         <p:nvSpPr>
-          <p:cNvPr id="4" name="Oval 3"/>
+          <p:cNvPr id="4" name="deckgen:decor"/>
           <p:cNvSpPr/>
           <p:nvPr/>
         </p:nvSpPr>
@@ -16710,7 +16710,7 @@
       <p:grpSpPr/>
       <p:sp>
         <p:nvSpPr>
-          <p:cNvPr id="2" name="Oval 1"/>
+          <p:cNvPr id="2" name="deckgen:decor"/>
           <p:cNvSpPr/>
           <p:nvPr/>
         </p:nvSpPr>
@@ -16740,7 +16740,7 @@
       </p:sp>
       <p:sp>
         <p:nvSpPr>
-          <p:cNvPr id="3" name="Oval 2"/>
+          <p:cNvPr id="3" name="deckgen:decor"/>
           <p:cNvSpPr/>
           <p:nvPr/>
         </p:nvSpPr>
@@ -16770,7 +16770,7 @@
       </p:sp>
       <p:sp>
         <p:nvSpPr>
-          <p:cNvPr id="4" name="Oval 3"/>
+          <p:cNvPr id="4" name="deckgen:decor"/>
           <p:cNvSpPr/>
           <p:nvPr/>
         </p:nvSpPr>
